--- a/Fase 1/Evidencias Grupales/Presentacion_Fase1_EcoPan.pptx
+++ b/Fase 1/Evidencias Grupales/Presentacion_Fase1_EcoPan.pptx
@@ -11810,7 +11810,7 @@
         <p:spPr>
           <a:xfrm>
             <a:off x="6263640" y="3840480"/>
-            <a:ext cx="5394960" cy="2240280"/>
+            <a:ext cx="5394900" cy="2240400"/>
           </a:xfrm>
           <a:prstGeom prst="roundRect">
             <a:avLst>
@@ -12145,7 +12145,55 @@
                 <a:cs typeface="Calibri"/>
                 <a:sym typeface="Calibri"/>
               </a:rPr>
-              <a:t>Siendo lo que más valoro es la ciberseguridad, Duoc me ha dado las herramientas necesarias para poder implementarlas en nuestro proyecto, tales como el acceso por roles, el aislamiento de datos entre distintas panaderías y metodología offline-first para las BD de las soluciones. Espero que este proyecto me permita crecer en lo que más aprecio: convertir datos en decisiones.</a:t>
+              <a:t>Siendo lo que más valoro es la ciberseguridad, Duoc me ha dado las herramientas necesarias para poder implementarlas en nuestro proyecto, tales como el acceso por roles, el aislamiento de datos entre distintas panaderías y metodología offline-first para las BD. Este proyecto me </a:t>
+            </a:r>
+            <a:r>
+              <a:rPr lang="en-US" sz="1130">
+                <a:solidFill>
+                  <a:srgbClr val="6E5F50"/>
+                </a:solidFill>
+                <a:latin typeface="Calibri"/>
+                <a:ea typeface="Calibri"/>
+                <a:cs typeface="Calibri"/>
+                <a:sym typeface="Calibri"/>
+              </a:rPr>
+              <a:t>permitió</a:t>
+            </a:r>
+            <a:r>
+              <a:rPr lang="en-US" sz="1130">
+                <a:solidFill>
+                  <a:srgbClr val="6E5F50"/>
+                </a:solidFill>
+                <a:latin typeface="Calibri"/>
+                <a:ea typeface="Calibri"/>
+                <a:cs typeface="Calibri"/>
+                <a:sym typeface="Calibri"/>
+              </a:rPr>
+              <a:t> crecer en lo que más aprecio, </a:t>
+            </a:r>
+            <a:r>
+              <a:rPr lang="en-US" sz="1130">
+                <a:solidFill>
+                  <a:srgbClr val="6E5F50"/>
+                </a:solidFill>
+                <a:latin typeface="Calibri"/>
+                <a:ea typeface="Calibri"/>
+                <a:cs typeface="Calibri"/>
+                <a:sym typeface="Calibri"/>
+              </a:rPr>
+              <a:t>qué</a:t>
+            </a:r>
+            <a:r>
+              <a:rPr lang="en-US" sz="1130">
+                <a:solidFill>
+                  <a:srgbClr val="6E5F50"/>
+                </a:solidFill>
+                <a:latin typeface="Calibri"/>
+                <a:ea typeface="Calibri"/>
+                <a:cs typeface="Calibri"/>
+                <a:sym typeface="Calibri"/>
+              </a:rPr>
+              <a:t> es la de convertir datos en decisiones.</a:t>
             </a:r>
             <a:endParaRPr b="0" sz="1130" u="none" cap="none" strike="noStrike">
               <a:solidFill>
@@ -18676,7 +18724,7 @@
         </p:nvSpPr>
         <p:spPr>
           <a:xfrm>
-            <a:off x="5705853" y="2080258"/>
+            <a:off x="5705828" y="2080258"/>
             <a:ext cx="777300" cy="777300"/>
           </a:xfrm>
           <a:prstGeom prst="ellipse">

--- a/Fase 1/Evidencias Grupales/Presentacion_Fase1_EcoPan.pptx
+++ b/Fase 1/Evidencias Grupales/Presentacion_Fase1_EcoPan.pptx
@@ -257,8 +257,11 @@
     </a:lvl9pPr>
   </p:defaultTextStyle>
   <p:extLst>
+    <p:ext uri="{EFAFB233-063F-42B5-8137-9DF3F51BA10A}">
+      <p15:sldGuideLst xmlns:p15="http://schemas.microsoft.com/office/powerpoint/2012/main"/>
+    </p:ext>
     <p:ext uri="GoogleSlidesCustomDataVersion2">
-      <go:slidesCustomData xmlns:go="http://customooxmlschemas.google.com/" xmlns:ahyp="http://schemas.microsoft.com/office/drawing/2018/hyperlinkcolor" xmlns:p15="http://schemas.microsoft.com/office/powerpoint/2012/main" xmlns:p14="http://schemas.microsoft.com/office/powerpoint/2010/main" xmlns:com="http://schemas.openxmlformats.org/drawingml/2006/compatibility" xmlns:pvml="urn:schemas-microsoft-com:office:powerpoint" xmlns:v="urn:schemas-microsoft-com:vml" xmlns:o="urn:schemas-microsoft-com:office:office" xmlns:dgm="http://schemas.openxmlformats.org/drawingml/2006/diagram" xmlns:c="http://schemas.openxmlformats.org/drawingml/2006/chart" xmlns:mv="urn:schemas-microsoft-com:mac:vml" xmlns:mc="http://schemas.openxmlformats.org/markup-compatibility/2006" xmlns="" r:id="rId21" roundtripDataSignature="AMtx7mh64EvIk3orI3OzWeb3IGL0gPZ8gA=="/>
+      <go:slidesCustomData xmlns="" xmlns:mc="http://schemas.openxmlformats.org/markup-compatibility/2006" xmlns:mv="urn:schemas-microsoft-com:mac:vml" xmlns:c="http://schemas.openxmlformats.org/drawingml/2006/chart" xmlns:dgm="http://schemas.openxmlformats.org/drawingml/2006/diagram" xmlns:o="urn:schemas-microsoft-com:office:office" xmlns:v="urn:schemas-microsoft-com:vml" xmlns:pvml="urn:schemas-microsoft-com:office:powerpoint" xmlns:com="http://schemas.openxmlformats.org/drawingml/2006/compatibility" xmlns:p14="http://schemas.microsoft.com/office/powerpoint/2010/main" xmlns:p15="http://schemas.microsoft.com/office/powerpoint/2012/main" xmlns:ahyp="http://schemas.microsoft.com/office/drawing/2018/hyperlinkcolor" xmlns:go="http://customooxmlschemas.google.com/" r:id="rId21" roundtripDataSignature="AMtx7mh64EvIk3orI3OzWeb3IGL0gPZ8gA=="/>
     </p:ext>
   </p:extLst>
 </p:presentation>
@@ -8371,7 +8374,7 @@
               <a:buNone/>
             </a:pPr>
             <a:r>
-              <a:rPr lang="en-US" sz="3000" b="1" i="0" u="none" strike="noStrike" cap="none">
+              <a:rPr lang="en-US" sz="3000" b="1" i="0" u="none" strike="noStrike" cap="none" dirty="0" err="1">
                 <a:solidFill>
                   <a:srgbClr val="D9A441"/>
                 </a:solidFill>
@@ -8383,7 +8386,7 @@
               <a:t>M</a:t>
             </a:r>
             <a:r>
-              <a:rPr lang="en-US" sz="3000" b="1" i="0" u="none" strike="noStrike" cap="none">
+              <a:rPr lang="en-US" sz="3000" b="1" i="0" u="none" strike="noStrike" cap="none" dirty="0" err="1">
                 <a:solidFill>
                   <a:srgbClr val="4A2C1A"/>
                 </a:solidFill>
@@ -8394,7 +8397,7 @@
               </a:rPr>
               <a:t>etodología</a:t>
             </a:r>
-            <a:endParaRPr sz="3000" i="0" u="none" strike="noStrike" cap="none">
+            <a:endParaRPr sz="3000" i="0" u="none" strike="noStrike" cap="none" dirty="0">
               <a:solidFill>
                 <a:srgbClr val="D9A441"/>
               </a:solidFill>
@@ -23988,7 +23991,7 @@
               <a:buNone/>
             </a:pPr>
             <a:r>
-              <a:rPr lang="en-US" sz="1450" b="1">
+              <a:rPr lang="es-ES" sz="1450" b="1" dirty="0">
                 <a:solidFill>
                   <a:srgbClr val="2E2318"/>
                 </a:solidFill>
@@ -23999,7 +24002,7 @@
               </a:rPr>
               <a:t>Requerimientos</a:t>
             </a:r>
-            <a:endParaRPr sz="1450">
+            <a:endParaRPr lang="es-ES" sz="1450" dirty="0">
               <a:solidFill>
                 <a:schemeClr val="dk1"/>
               </a:solidFill>
@@ -35275,7 +35278,7 @@
               <a:buNone/>
             </a:pPr>
             <a:r>
-              <a:rPr lang="en-US" sz="3000" b="1" i="0" u="none" strike="noStrike" cap="none">
+              <a:rPr lang="en-US" sz="3000" b="1" i="0" u="none" strike="noStrike" cap="none" dirty="0">
                 <a:solidFill>
                   <a:srgbClr val="D9A441"/>
                 </a:solidFill>
@@ -35287,7 +35290,7 @@
               <a:t>R</a:t>
             </a:r>
             <a:r>
-              <a:rPr lang="en-US" sz="3000" b="1" i="0" u="none" strike="noStrike" cap="none">
+              <a:rPr lang="en-US" sz="3000" b="1" i="0" u="none" strike="noStrike" cap="none" dirty="0">
                 <a:solidFill>
                   <a:srgbClr val="4A2C1A"/>
                 </a:solidFill>
@@ -35298,31 +35301,7 @@
               </a:rPr>
               <a:t>equerimientos</a:t>
             </a:r>
-            <a:r>
-              <a:rPr lang="en-US" sz="3000" b="1" i="0" u="none" strike="noStrike" cap="none">
-                <a:solidFill>
-                  <a:srgbClr val="D9A441"/>
-                </a:solidFill>
-                <a:latin typeface="Calibri"/>
-                <a:ea typeface="Calibri"/>
-                <a:cs typeface="Calibri"/>
-                <a:sym typeface="Calibri"/>
-              </a:rPr>
-              <a:t> </a:t>
-            </a:r>
-            <a:r>
-              <a:rPr lang="en-US" sz="3000" b="1" i="0" u="none" strike="noStrike" cap="none">
-                <a:solidFill>
-                  <a:srgbClr val="2E2318"/>
-                </a:solidFill>
-                <a:latin typeface="Calibri"/>
-                <a:ea typeface="Calibri"/>
-                <a:cs typeface="Calibri"/>
-                <a:sym typeface="Calibri"/>
-              </a:rPr>
-              <a:t>funcionales y no funcionales</a:t>
-            </a:r>
-            <a:endParaRPr sz="3000" i="0" u="none" strike="noStrike" cap="none">
+            <a:endParaRPr sz="3000" i="0" u="none" strike="noStrike" cap="none" dirty="0">
               <a:solidFill>
                 <a:schemeClr val="dk1"/>
               </a:solidFill>
@@ -37145,81 +37124,6 @@
       </p:grpSpPr>
       <p:sp>
         <p:nvSpPr>
-          <p:cNvPr id="250" name="Google Shape;250;p9"/>
-          <p:cNvSpPr/>
-          <p:nvPr/>
-        </p:nvSpPr>
-        <p:spPr>
-          <a:xfrm>
-            <a:off x="548640" y="292608"/>
-            <a:ext cx="11091672" cy="658368"/>
-          </a:xfrm>
-          <a:prstGeom prst="rect">
-            <a:avLst/>
-          </a:prstGeom>
-          <a:noFill/>
-          <a:ln>
-            <a:noFill/>
-          </a:ln>
-        </p:spPr>
-        <p:txBody>
-          <a:bodyPr spcFirstLastPara="1" wrap="square" lIns="0" tIns="0" rIns="0" bIns="0" anchor="ctr" anchorCtr="0">
-            <a:noAutofit/>
-          </a:bodyPr>
-          <a:lstStyle/>
-          <a:p>
-            <a:pPr marL="0" marR="0" lvl="0" indent="0" algn="l" rtl="0">
-              <a:spcBef>
-                <a:spcPts val="0"/>
-              </a:spcBef>
-              <a:spcAft>
-                <a:spcPts val="0"/>
-              </a:spcAft>
-              <a:buClr>
-                <a:srgbClr val="D9A441"/>
-              </a:buClr>
-              <a:buSzPts val="2900"/>
-              <a:buFont typeface="Cambria"/>
-              <a:buNone/>
-            </a:pPr>
-            <a:r>
-              <a:rPr lang="en-US" sz="2900" b="1">
-                <a:solidFill>
-                  <a:srgbClr val="D9A441"/>
-                </a:solidFill>
-                <a:latin typeface="Cambria"/>
-                <a:ea typeface="Cambria"/>
-                <a:cs typeface="Cambria"/>
-                <a:sym typeface="Cambria"/>
-              </a:rPr>
-              <a:t>Arquitectura: </a:t>
-            </a:r>
-            <a:r>
-              <a:rPr lang="en-US" sz="2900" b="1">
-                <a:solidFill>
-                  <a:srgbClr val="2E2318"/>
-                </a:solidFill>
-                <a:latin typeface="Cambria"/>
-                <a:ea typeface="Cambria"/>
-                <a:cs typeface="Cambria"/>
-                <a:sym typeface="Cambria"/>
-              </a:rPr>
-              <a:t>componentes, límites y stack tecnológico</a:t>
-            </a:r>
-            <a:endParaRPr sz="2900">
-              <a:solidFill>
-                <a:schemeClr val="dk1"/>
-              </a:solidFill>
-              <a:latin typeface="Calibri"/>
-              <a:ea typeface="Calibri"/>
-              <a:cs typeface="Calibri"/>
-              <a:sym typeface="Calibri"/>
-            </a:endParaRPr>
-          </a:p>
-        </p:txBody>
-      </p:sp>
-      <p:sp>
-        <p:nvSpPr>
           <p:cNvPr id="251" name="Google Shape;251;p9"/>
           <p:cNvSpPr/>
           <p:nvPr/>
@@ -37308,6 +37212,87 @@
           </a:ln>
         </p:spPr>
       </p:pic>
+      <p:sp>
+        <p:nvSpPr>
+          <p:cNvPr id="3" name="Google Shape;271;p10">
+            <a:extLst>
+              <a:ext uri="{FF2B5EF4-FFF2-40B4-BE49-F238E27FC236}">
+                <a16:creationId xmlns:a16="http://schemas.microsoft.com/office/drawing/2014/main" id="{8855F79A-1315-97A7-9245-701FB6EAA72B}"/>
+              </a:ext>
+            </a:extLst>
+          </p:cNvPr>
+          <p:cNvSpPr/>
+          <p:nvPr/>
+        </p:nvSpPr>
+        <p:spPr>
+          <a:xfrm>
+            <a:off x="548640" y="320040"/>
+            <a:ext cx="11091672" cy="685800"/>
+          </a:xfrm>
+          <a:prstGeom prst="rect">
+            <a:avLst/>
+          </a:prstGeom>
+          <a:noFill/>
+          <a:ln>
+            <a:noFill/>
+          </a:ln>
+        </p:spPr>
+        <p:txBody>
+          <a:bodyPr spcFirstLastPara="1" wrap="square" lIns="0" tIns="0" rIns="0" bIns="0" anchor="ctr" anchorCtr="0">
+            <a:noAutofit/>
+          </a:bodyPr>
+          <a:lstStyle/>
+          <a:p>
+            <a:pPr marL="0" marR="0" lvl="0" indent="0" algn="l" rtl="0">
+              <a:spcBef>
+                <a:spcPts val="0"/>
+              </a:spcBef>
+              <a:spcAft>
+                <a:spcPts val="0"/>
+              </a:spcAft>
+              <a:buClr>
+                <a:srgbClr val="D9A441"/>
+              </a:buClr>
+              <a:buSzPts val="3000"/>
+              <a:buFont typeface="Cambria"/>
+              <a:buNone/>
+            </a:pPr>
+            <a:r>
+              <a:rPr lang="en-US" sz="3000" b="1" i="0" u="none" strike="noStrike" cap="none" dirty="0" err="1">
+                <a:solidFill>
+                  <a:srgbClr val="D9A441"/>
+                </a:solidFill>
+                <a:latin typeface="Calibri"/>
+                <a:ea typeface="Calibri"/>
+                <a:cs typeface="Calibri"/>
+                <a:sym typeface="Calibri"/>
+              </a:rPr>
+              <a:t>A</a:t>
+            </a:r>
+            <a:r>
+              <a:rPr lang="en-US" sz="3000" b="1" i="0" u="none" strike="noStrike" cap="none" dirty="0" err="1">
+                <a:solidFill>
+                  <a:srgbClr val="4A2C1A"/>
+                </a:solidFill>
+                <a:latin typeface="Calibri"/>
+                <a:ea typeface="Calibri"/>
+                <a:cs typeface="Calibri"/>
+                <a:sym typeface="Calibri"/>
+              </a:rPr>
+              <a:t>rquitectura</a:t>
+            </a:r>
+            <a:endParaRPr sz="3000" i="0" u="none" strike="noStrike" cap="none" dirty="0">
+              <a:solidFill>
+                <a:srgbClr val="D9A441"/>
+              </a:solidFill>
+              <a:latin typeface="Calibri"/>
+              <a:ea typeface="Calibri"/>
+              <a:cs typeface="Calibri"/>
+              <a:sym typeface="Calibri"/>
+            </a:endParaRPr>
+          </a:p>
+        </p:txBody>
+      </p:sp>
     </p:spTree>
   </p:cSld>
   <p:clrMapOvr>
